--- a/examples/dogfood/output/infographic.pptx
+++ b/examples/dogfood/output/infographic.pptx
@@ -3266,7 +3266,7 @@
           <a:lstStyle/>
           <a:p>
             <a:r>
-              <a:rPr sz="2600" b="1" i="0">
+              <a:rPr sz="3000" b="1" i="0">
                 <a:solidFill>
                   <a:srgbClr val="14161A"/>
                 </a:solidFill>
@@ -3286,7 +3286,7 @@
         <p:spPr>
           <a:xfrm>
             <a:off x="548640" y="1042416"/>
-            <a:ext cx="11094415" cy="25603"/>
+            <a:ext cx="1097280" cy="25603"/>
           </a:xfrm>
           <a:prstGeom prst="rect">
             <a:avLst/>
@@ -3329,7 +3329,7 @@
         </p:nvSpPr>
         <p:spPr>
           <a:xfrm>
-            <a:off x="548640" y="2221443"/>
+            <a:off x="548640" y="2441813"/>
             <a:ext cx="11094415" cy="288925"/>
           </a:xfrm>
           <a:prstGeom prst="rect">
@@ -3363,7 +3363,7 @@
         </p:nvSpPr>
         <p:spPr>
           <a:xfrm>
-            <a:off x="548640" y="3113872"/>
+            <a:off x="548640" y="2877042"/>
             <a:ext cx="11094415" cy="1920874"/>
           </a:xfrm>
           <a:prstGeom prst="rect">
@@ -3531,13 +3531,48 @@
       <p:grpSpPr/>
       <p:sp>
         <p:nvSpPr>
-          <p:cNvPr id="2" name="Rectangle 1"/>
+          <p:cNvPr id="2" name="TextBox 1"/>
+          <p:cNvSpPr txBox="1"/>
+          <p:nvPr/>
+        </p:nvSpPr>
+        <p:spPr>
+          <a:xfrm>
+            <a:off x="7619695" y="274320"/>
+            <a:ext cx="4023360" cy="6309360"/>
+          </a:xfrm>
+          <a:prstGeom prst="rect">
+            <a:avLst/>
+          </a:prstGeom>
+          <a:noFill/>
+        </p:spPr>
+        <p:txBody>
+          <a:bodyPr wrap="square" lIns="0" rIns="0" tIns="0" bIns="0" anchor="ctr">
+            <a:normAutofit/>
+          </a:bodyPr>
+          <a:lstStyle/>
+          <a:p>
+            <a:pPr algn="r"/>
+            <a:r>
+              <a:rPr sz="15000" b="1" i="0">
+                <a:solidFill>
+                  <a:srgbClr val="3C5677"/>
+                </a:solidFill>
+                <a:latin typeface="IBM Plex Sans"/>
+              </a:rPr>
+              <a:t>01</a:t>
+            </a:r>
+          </a:p>
+        </p:txBody>
+      </p:sp>
+      <p:sp>
+        <p:nvSpPr>
+          <p:cNvPr id="3" name="Rectangle 2"/>
           <p:cNvSpPr/>
           <p:nvPr/>
         </p:nvSpPr>
         <p:spPr>
           <a:xfrm>
-            <a:off x="548640" y="2487168"/>
+            <a:off x="548640" y="2466594"/>
             <a:ext cx="1097280" cy="45720"/>
           </a:xfrm>
           <a:prstGeom prst="rect">
@@ -3575,14 +3610,14 @@
       </p:sp>
       <p:sp>
         <p:nvSpPr>
-          <p:cNvPr id="3" name="TextBox 2"/>
+          <p:cNvPr id="4" name="TextBox 3"/>
           <p:cNvSpPr txBox="1"/>
           <p:nvPr/>
         </p:nvSpPr>
         <p:spPr>
           <a:xfrm>
-            <a:off x="548640" y="2743200"/>
-            <a:ext cx="11094415" cy="1005840"/>
+            <a:off x="548640" y="2768346"/>
+            <a:ext cx="11094415" cy="1188720"/>
           </a:xfrm>
           <a:prstGeom prst="rect">
             <a:avLst/>
@@ -3609,14 +3644,14 @@
       </p:sp>
       <p:sp>
         <p:nvSpPr>
-          <p:cNvPr id="4" name="TextBox 3"/>
+          <p:cNvPr id="5" name="TextBox 4"/>
           <p:cNvSpPr txBox="1"/>
           <p:nvPr/>
         </p:nvSpPr>
         <p:spPr>
           <a:xfrm>
-            <a:off x="548640" y="3886200"/>
-            <a:ext cx="11094415" cy="548640"/>
+            <a:off x="548640" y="3957065"/>
+            <a:ext cx="11094415" cy="434340"/>
           </a:xfrm>
           <a:prstGeom prst="rect">
             <a:avLst/>
@@ -3690,7 +3725,7 @@
           <a:lstStyle/>
           <a:p>
             <a:r>
-              <a:rPr sz="2600" b="1" i="0">
+              <a:rPr sz="3000" b="1" i="0">
                 <a:solidFill>
                   <a:srgbClr val="14161A"/>
                 </a:solidFill>
@@ -3710,7 +3745,7 @@
         <p:spPr>
           <a:xfrm>
             <a:off x="548640" y="1042416"/>
-            <a:ext cx="11094415" cy="25603"/>
+            <a:ext cx="1097280" cy="25603"/>
           </a:xfrm>
           <a:prstGeom prst="rect">
             <a:avLst/>
@@ -3753,7 +3788,7 @@
         </p:nvSpPr>
         <p:spPr>
           <a:xfrm>
-            <a:off x="548640" y="2414214"/>
+            <a:off x="548640" y="2534482"/>
             <a:ext cx="2036003" cy="1280160"/>
           </a:xfrm>
           <a:prstGeom prst="roundRect">
@@ -3797,8 +3832,8 @@
         </p:nvSpPr>
         <p:spPr>
           <a:xfrm>
-            <a:off x="713232" y="2578806"/>
-            <a:ext cx="1706819" cy="384048"/>
+            <a:off x="713232" y="2699074"/>
+            <a:ext cx="1706819" cy="487680"/>
           </a:xfrm>
           <a:prstGeom prst="rect">
             <a:avLst/>
@@ -3831,7 +3866,7 @@
         </p:nvSpPr>
         <p:spPr>
           <a:xfrm>
-            <a:off x="713232" y="3036006"/>
+            <a:off x="713232" y="3186754"/>
             <a:ext cx="1706819" cy="237744"/>
           </a:xfrm>
           <a:prstGeom prst="rect">
@@ -3865,7 +3900,7 @@
         </p:nvSpPr>
         <p:spPr>
           <a:xfrm>
-            <a:off x="713232" y="3328614"/>
+            <a:off x="713232" y="3479362"/>
             <a:ext cx="1706819" cy="201168"/>
           </a:xfrm>
           <a:prstGeom prst="rect">
@@ -3899,7 +3934,7 @@
         </p:nvSpPr>
         <p:spPr>
           <a:xfrm>
-            <a:off x="2813243" y="2414214"/>
+            <a:off x="2813243" y="2534482"/>
             <a:ext cx="2036003" cy="1280160"/>
           </a:xfrm>
           <a:prstGeom prst="roundRect">
@@ -3943,8 +3978,8 @@
         </p:nvSpPr>
         <p:spPr>
           <a:xfrm>
-            <a:off x="2977835" y="2578806"/>
-            <a:ext cx="1706819" cy="384048"/>
+            <a:off x="2977835" y="2699074"/>
+            <a:ext cx="1706819" cy="487680"/>
           </a:xfrm>
           <a:prstGeom prst="rect">
             <a:avLst/>
@@ -3977,7 +4012,7 @@
         </p:nvSpPr>
         <p:spPr>
           <a:xfrm>
-            <a:off x="2977835" y="3036006"/>
+            <a:off x="2977835" y="3186754"/>
             <a:ext cx="1706819" cy="237744"/>
           </a:xfrm>
           <a:prstGeom prst="rect">
@@ -4011,7 +4046,7 @@
         </p:nvSpPr>
         <p:spPr>
           <a:xfrm>
-            <a:off x="2977835" y="3328614"/>
+            <a:off x="2977835" y="3479362"/>
             <a:ext cx="1706819" cy="201168"/>
           </a:xfrm>
           <a:prstGeom prst="rect">
@@ -4045,7 +4080,7 @@
         </p:nvSpPr>
         <p:spPr>
           <a:xfrm>
-            <a:off x="5077846" y="2414214"/>
+            <a:off x="5077846" y="2534482"/>
             <a:ext cx="2036003" cy="1280160"/>
           </a:xfrm>
           <a:prstGeom prst="roundRect">
@@ -4089,8 +4124,8 @@
         </p:nvSpPr>
         <p:spPr>
           <a:xfrm>
-            <a:off x="5242438" y="2578806"/>
-            <a:ext cx="1706819" cy="384048"/>
+            <a:off x="5242438" y="2699074"/>
+            <a:ext cx="1706819" cy="487680"/>
           </a:xfrm>
           <a:prstGeom prst="rect">
             <a:avLst/>
@@ -4123,7 +4158,7 @@
         </p:nvSpPr>
         <p:spPr>
           <a:xfrm>
-            <a:off x="5242438" y="3036006"/>
+            <a:off x="5242438" y="3186754"/>
             <a:ext cx="1706819" cy="237744"/>
           </a:xfrm>
           <a:prstGeom prst="rect">
@@ -4157,7 +4192,7 @@
         </p:nvSpPr>
         <p:spPr>
           <a:xfrm>
-            <a:off x="5242438" y="3328614"/>
+            <a:off x="5242438" y="3479362"/>
             <a:ext cx="1706819" cy="201168"/>
           </a:xfrm>
           <a:prstGeom prst="rect">
@@ -4191,7 +4226,7 @@
         </p:nvSpPr>
         <p:spPr>
           <a:xfrm>
-            <a:off x="7342449" y="2414214"/>
+            <a:off x="7342449" y="2534482"/>
             <a:ext cx="2036003" cy="1280160"/>
           </a:xfrm>
           <a:prstGeom prst="roundRect">
@@ -4235,8 +4270,8 @@
         </p:nvSpPr>
         <p:spPr>
           <a:xfrm>
-            <a:off x="7507041" y="2578806"/>
-            <a:ext cx="1706819" cy="384048"/>
+            <a:off x="7507041" y="2699074"/>
+            <a:ext cx="1706819" cy="487680"/>
           </a:xfrm>
           <a:prstGeom prst="rect">
             <a:avLst/>
@@ -4269,7 +4304,7 @@
         </p:nvSpPr>
         <p:spPr>
           <a:xfrm>
-            <a:off x="7507041" y="3036006"/>
+            <a:off x="7507041" y="3186754"/>
             <a:ext cx="1706819" cy="237744"/>
           </a:xfrm>
           <a:prstGeom prst="rect">
@@ -4303,7 +4338,7 @@
         </p:nvSpPr>
         <p:spPr>
           <a:xfrm>
-            <a:off x="7507041" y="3328614"/>
+            <a:off x="7507041" y="3479362"/>
             <a:ext cx="1706819" cy="201168"/>
           </a:xfrm>
           <a:prstGeom prst="rect">
@@ -4337,7 +4372,7 @@
         </p:nvSpPr>
         <p:spPr>
           <a:xfrm>
-            <a:off x="9607052" y="2414214"/>
+            <a:off x="9607052" y="2534482"/>
             <a:ext cx="2036003" cy="1280160"/>
           </a:xfrm>
           <a:prstGeom prst="roundRect">
@@ -4381,8 +4416,8 @@
         </p:nvSpPr>
         <p:spPr>
           <a:xfrm>
-            <a:off x="9771644" y="2578806"/>
-            <a:ext cx="1706819" cy="384048"/>
+            <a:off x="9771644" y="2699074"/>
+            <a:ext cx="1706819" cy="487680"/>
           </a:xfrm>
           <a:prstGeom prst="rect">
             <a:avLst/>
@@ -4415,7 +4450,7 @@
         </p:nvSpPr>
         <p:spPr>
           <a:xfrm>
-            <a:off x="9771644" y="3036006"/>
+            <a:off x="9771644" y="3186754"/>
             <a:ext cx="1706819" cy="237744"/>
           </a:xfrm>
           <a:prstGeom prst="rect">
@@ -4449,7 +4484,7 @@
         </p:nvSpPr>
         <p:spPr>
           <a:xfrm>
-            <a:off x="9771644" y="3328614"/>
+            <a:off x="9771644" y="3479362"/>
             <a:ext cx="1706819" cy="201168"/>
           </a:xfrm>
           <a:prstGeom prst="rect">
@@ -4483,8 +4518,8 @@
         </p:nvSpPr>
         <p:spPr>
           <a:xfrm>
-            <a:off x="548640" y="4297878"/>
-            <a:ext cx="11094415" cy="470662"/>
+            <a:off x="548640" y="3960946"/>
+            <a:ext cx="9430252" cy="723709"/>
           </a:xfrm>
           <a:prstGeom prst="rect">
             <a:avLst/>
@@ -4527,8 +4562,8 @@
         </p:nvSpPr>
         <p:spPr>
           <a:xfrm>
-            <a:off x="548640" y="4297878"/>
-            <a:ext cx="73152" cy="470662"/>
+            <a:off x="548640" y="3960946"/>
+            <a:ext cx="91440" cy="723709"/>
           </a:xfrm>
           <a:prstGeom prst="rect">
             <a:avLst/>
@@ -4571,8 +4606,8 @@
         </p:nvSpPr>
         <p:spPr>
           <a:xfrm>
-            <a:off x="749808" y="4425894"/>
-            <a:ext cx="10765231" cy="214630"/>
+            <a:off x="859536" y="4180402"/>
+            <a:ext cx="8899900" cy="284797"/>
           </a:xfrm>
           <a:prstGeom prst="rect">
             <a:avLst/>
@@ -4586,7 +4621,7 @@
           <a:lstStyle/>
           <a:p>
             <a:r>
-              <a:rPr sz="1300" b="0" i="0">
+              <a:rPr sz="1725" b="1" i="0">
                 <a:solidFill>
                   <a:srgbClr val="14161A"/>
                 </a:solidFill>
@@ -4646,7 +4681,7 @@
           <a:lstStyle/>
           <a:p>
             <a:r>
-              <a:rPr sz="2600" b="1" i="0">
+              <a:rPr sz="3000" b="1" i="0">
                 <a:solidFill>
                   <a:srgbClr val="14161A"/>
                 </a:solidFill>
@@ -4666,7 +4701,7 @@
         <p:spPr>
           <a:xfrm>
             <a:off x="548640" y="1042416"/>
-            <a:ext cx="11094415" cy="25603"/>
+            <a:ext cx="1097280" cy="25603"/>
           </a:xfrm>
           <a:prstGeom prst="rect">
             <a:avLst/>
@@ -4709,7 +4744,7 @@
         </p:nvSpPr>
         <p:spPr>
           <a:xfrm>
-            <a:off x="548640" y="2865363"/>
+            <a:off x="548640" y="3117189"/>
             <a:ext cx="2036003" cy="1280160"/>
           </a:xfrm>
           <a:prstGeom prst="roundRect">
@@ -4753,8 +4788,8 @@
         </p:nvSpPr>
         <p:spPr>
           <a:xfrm>
-            <a:off x="713232" y="3029955"/>
-            <a:ext cx="1706819" cy="384048"/>
+            <a:off x="713232" y="3281781"/>
+            <a:ext cx="1706819" cy="487680"/>
           </a:xfrm>
           <a:prstGeom prst="rect">
             <a:avLst/>
@@ -4773,7 +4808,7 @@
               </a:lnSpc>
             </a:pPr>
             <a:r>
-              <a:rPr sz="1600" b="1" i="0">
+              <a:rPr sz="2000" b="1" i="0">
                 <a:solidFill>
                   <a:srgbClr val="1F3D63"/>
                 </a:solidFill>
@@ -4792,7 +4827,7 @@
         </p:nvSpPr>
         <p:spPr>
           <a:xfrm>
-            <a:off x="713232" y="3487155"/>
+            <a:off x="713232" y="3769461"/>
             <a:ext cx="1706819" cy="237744"/>
           </a:xfrm>
           <a:prstGeom prst="rect">
@@ -4826,7 +4861,7 @@
         </p:nvSpPr>
         <p:spPr>
           <a:xfrm>
-            <a:off x="2813243" y="2865363"/>
+            <a:off x="2813243" y="3117189"/>
             <a:ext cx="2036003" cy="1280160"/>
           </a:xfrm>
           <a:prstGeom prst="roundRect">
@@ -4870,8 +4905,8 @@
         </p:nvSpPr>
         <p:spPr>
           <a:xfrm>
-            <a:off x="2977835" y="3029955"/>
-            <a:ext cx="1706819" cy="384048"/>
+            <a:off x="2977835" y="3281781"/>
+            <a:ext cx="1706819" cy="487680"/>
           </a:xfrm>
           <a:prstGeom prst="rect">
             <a:avLst/>
@@ -4904,7 +4939,7 @@
         </p:nvSpPr>
         <p:spPr>
           <a:xfrm>
-            <a:off x="2977835" y="3487155"/>
+            <a:off x="2977835" y="3769461"/>
             <a:ext cx="1706819" cy="237744"/>
           </a:xfrm>
           <a:prstGeom prst="rect">
@@ -4938,7 +4973,7 @@
         </p:nvSpPr>
         <p:spPr>
           <a:xfrm>
-            <a:off x="5077846" y="2865363"/>
+            <a:off x="5077846" y="3117189"/>
             <a:ext cx="2036003" cy="1280160"/>
           </a:xfrm>
           <a:prstGeom prst="roundRect">
@@ -4982,8 +5017,8 @@
         </p:nvSpPr>
         <p:spPr>
           <a:xfrm>
-            <a:off x="5242438" y="3029955"/>
-            <a:ext cx="1706819" cy="384048"/>
+            <a:off x="5242438" y="3281781"/>
+            <a:ext cx="1706819" cy="487680"/>
           </a:xfrm>
           <a:prstGeom prst="rect">
             <a:avLst/>
@@ -5016,7 +5051,7 @@
         </p:nvSpPr>
         <p:spPr>
           <a:xfrm>
-            <a:off x="5242438" y="3487155"/>
+            <a:off x="5242438" y="3769461"/>
             <a:ext cx="1706819" cy="237744"/>
           </a:xfrm>
           <a:prstGeom prst="rect">
@@ -5050,7 +5085,7 @@
         </p:nvSpPr>
         <p:spPr>
           <a:xfrm>
-            <a:off x="7342449" y="2865363"/>
+            <a:off x="7342449" y="3117189"/>
             <a:ext cx="2036003" cy="1280160"/>
           </a:xfrm>
           <a:prstGeom prst="roundRect">
@@ -5094,8 +5129,8 @@
         </p:nvSpPr>
         <p:spPr>
           <a:xfrm>
-            <a:off x="7507041" y="3029955"/>
-            <a:ext cx="1706819" cy="384048"/>
+            <a:off x="7507041" y="3281781"/>
+            <a:ext cx="1706819" cy="487680"/>
           </a:xfrm>
           <a:prstGeom prst="rect">
             <a:avLst/>
@@ -5128,7 +5163,7 @@
         </p:nvSpPr>
         <p:spPr>
           <a:xfrm>
-            <a:off x="7507041" y="3487155"/>
+            <a:off x="7507041" y="3769461"/>
             <a:ext cx="1706819" cy="237744"/>
           </a:xfrm>
           <a:prstGeom prst="rect">
@@ -5162,7 +5197,7 @@
         </p:nvSpPr>
         <p:spPr>
           <a:xfrm>
-            <a:off x="9607052" y="2865363"/>
+            <a:off x="9607052" y="3117189"/>
             <a:ext cx="2036003" cy="1280160"/>
           </a:xfrm>
           <a:prstGeom prst="roundRect">
@@ -5206,8 +5241,8 @@
         </p:nvSpPr>
         <p:spPr>
           <a:xfrm>
-            <a:off x="9771644" y="3029955"/>
-            <a:ext cx="1706819" cy="384048"/>
+            <a:off x="9771644" y="3281781"/>
+            <a:ext cx="1706819" cy="487680"/>
           </a:xfrm>
           <a:prstGeom prst="rect">
             <a:avLst/>
@@ -5240,7 +5275,7 @@
         </p:nvSpPr>
         <p:spPr>
           <a:xfrm>
-            <a:off x="9771644" y="3487155"/>
+            <a:off x="9771644" y="3769461"/>
             <a:ext cx="1706819" cy="237744"/>
           </a:xfrm>
           <a:prstGeom prst="rect">
@@ -5315,7 +5350,7 @@
           <a:lstStyle/>
           <a:p>
             <a:r>
-              <a:rPr sz="2600" b="1" i="0">
+              <a:rPr sz="3000" b="1" i="0">
                 <a:solidFill>
                   <a:srgbClr val="14161A"/>
                 </a:solidFill>
@@ -5335,7 +5370,7 @@
         <p:spPr>
           <a:xfrm>
             <a:off x="548640" y="1042416"/>
-            <a:ext cx="11094415" cy="25603"/>
+            <a:ext cx="1097280" cy="25603"/>
           </a:xfrm>
           <a:prstGeom prst="rect">
             <a:avLst/>
@@ -5378,7 +5413,7 @@
         </p:nvSpPr>
         <p:spPr>
           <a:xfrm>
-            <a:off x="548640" y="2414214"/>
+            <a:off x="548640" y="2406323"/>
             <a:ext cx="2036003" cy="1280160"/>
           </a:xfrm>
           <a:prstGeom prst="roundRect">
@@ -5422,8 +5457,8 @@
         </p:nvSpPr>
         <p:spPr>
           <a:xfrm>
-            <a:off x="713232" y="2578806"/>
-            <a:ext cx="1706819" cy="384048"/>
+            <a:off x="713232" y="2570915"/>
+            <a:ext cx="1706819" cy="487680"/>
           </a:xfrm>
           <a:prstGeom prst="rect">
             <a:avLst/>
@@ -5442,7 +5477,7 @@
               </a:lnSpc>
             </a:pPr>
             <a:r>
-              <a:rPr sz="1600" b="1" i="0">
+              <a:rPr sz="2000" b="1" i="0">
                 <a:solidFill>
                   <a:srgbClr val="1F3D63"/>
                 </a:solidFill>
@@ -5461,7 +5496,7 @@
         </p:nvSpPr>
         <p:spPr>
           <a:xfrm>
-            <a:off x="713232" y="3036006"/>
+            <a:off x="713232" y="3058595"/>
             <a:ext cx="1706819" cy="237744"/>
           </a:xfrm>
           <a:prstGeom prst="rect">
@@ -5495,7 +5530,7 @@
         </p:nvSpPr>
         <p:spPr>
           <a:xfrm>
-            <a:off x="2813243" y="2414214"/>
+            <a:off x="2813243" y="2406323"/>
             <a:ext cx="2036003" cy="1280160"/>
           </a:xfrm>
           <a:prstGeom prst="roundRect">
@@ -5539,8 +5574,8 @@
         </p:nvSpPr>
         <p:spPr>
           <a:xfrm>
-            <a:off x="2977835" y="2578806"/>
-            <a:ext cx="1706819" cy="384048"/>
+            <a:off x="2977835" y="2570915"/>
+            <a:ext cx="1706819" cy="487680"/>
           </a:xfrm>
           <a:prstGeom prst="rect">
             <a:avLst/>
@@ -5553,8 +5588,13 @@
           </a:bodyPr>
           <a:lstStyle/>
           <a:p>
-            <a:r>
-              <a:rPr sz="1750" b="1" i="0">
+            <a:pPr>
+              <a:lnSpc>
+                <a:spcPct val="80000"/>
+              </a:lnSpc>
+            </a:pPr>
+            <a:r>
+              <a:rPr sz="2000" b="1" i="0">
                 <a:solidFill>
                   <a:srgbClr val="1F3D63"/>
                 </a:solidFill>
@@ -5573,7 +5613,7 @@
         </p:nvSpPr>
         <p:spPr>
           <a:xfrm>
-            <a:off x="2977835" y="3036006"/>
+            <a:off x="2977835" y="3058595"/>
             <a:ext cx="1706819" cy="237744"/>
           </a:xfrm>
           <a:prstGeom prst="rect">
@@ -5607,7 +5647,7 @@
         </p:nvSpPr>
         <p:spPr>
           <a:xfrm>
-            <a:off x="5077846" y="2414214"/>
+            <a:off x="5077846" y="2406323"/>
             <a:ext cx="2036003" cy="1280160"/>
           </a:xfrm>
           <a:prstGeom prst="roundRect">
@@ -5651,8 +5691,8 @@
         </p:nvSpPr>
         <p:spPr>
           <a:xfrm>
-            <a:off x="5242438" y="2578806"/>
-            <a:ext cx="1706819" cy="384048"/>
+            <a:off x="5242438" y="2570915"/>
+            <a:ext cx="1706819" cy="487680"/>
           </a:xfrm>
           <a:prstGeom prst="rect">
             <a:avLst/>
@@ -5685,7 +5725,7 @@
         </p:nvSpPr>
         <p:spPr>
           <a:xfrm>
-            <a:off x="5242438" y="3036006"/>
+            <a:off x="5242438" y="3058595"/>
             <a:ext cx="1706819" cy="237744"/>
           </a:xfrm>
           <a:prstGeom prst="rect">
@@ -5719,7 +5759,7 @@
         </p:nvSpPr>
         <p:spPr>
           <a:xfrm>
-            <a:off x="7342449" y="2414214"/>
+            <a:off x="7342449" y="2406323"/>
             <a:ext cx="2036003" cy="1280160"/>
           </a:xfrm>
           <a:prstGeom prst="roundRect">
@@ -5763,8 +5803,8 @@
         </p:nvSpPr>
         <p:spPr>
           <a:xfrm>
-            <a:off x="7507041" y="2578806"/>
-            <a:ext cx="1706819" cy="384048"/>
+            <a:off x="7507041" y="2570915"/>
+            <a:ext cx="1706819" cy="487680"/>
           </a:xfrm>
           <a:prstGeom prst="rect">
             <a:avLst/>
@@ -5777,8 +5817,13 @@
           </a:bodyPr>
           <a:lstStyle/>
           <a:p>
-            <a:r>
-              <a:rPr sz="1750" b="1" i="0">
+            <a:pPr>
+              <a:lnSpc>
+                <a:spcPct val="80000"/>
+              </a:lnSpc>
+            </a:pPr>
+            <a:r>
+              <a:rPr sz="2000" b="1" i="0">
                 <a:solidFill>
                   <a:srgbClr val="1F3D63"/>
                 </a:solidFill>
@@ -5797,7 +5842,7 @@
         </p:nvSpPr>
         <p:spPr>
           <a:xfrm>
-            <a:off x="7507041" y="3036006"/>
+            <a:off x="7507041" y="3058595"/>
             <a:ext cx="1706819" cy="237744"/>
           </a:xfrm>
           <a:prstGeom prst="rect">
@@ -5831,7 +5876,7 @@
         </p:nvSpPr>
         <p:spPr>
           <a:xfrm>
-            <a:off x="9607052" y="2414214"/>
+            <a:off x="9607052" y="2406323"/>
             <a:ext cx="2036003" cy="1280160"/>
           </a:xfrm>
           <a:prstGeom prst="roundRect">
@@ -5875,8 +5920,8 @@
         </p:nvSpPr>
         <p:spPr>
           <a:xfrm>
-            <a:off x="9771644" y="2578806"/>
-            <a:ext cx="1706819" cy="384048"/>
+            <a:off x="9771644" y="2570915"/>
+            <a:ext cx="1706819" cy="487680"/>
           </a:xfrm>
           <a:prstGeom prst="rect">
             <a:avLst/>
@@ -5889,8 +5934,13 @@
           </a:bodyPr>
           <a:lstStyle/>
           <a:p>
-            <a:r>
-              <a:rPr sz="1650" b="1" i="0">
+            <a:pPr>
+              <a:lnSpc>
+                <a:spcPct val="80000"/>
+              </a:lnSpc>
+            </a:pPr>
+            <a:r>
+              <a:rPr sz="2000" b="1" i="0">
                 <a:solidFill>
                   <a:srgbClr val="1F3D63"/>
                 </a:solidFill>
@@ -5909,7 +5959,7 @@
         </p:nvSpPr>
         <p:spPr>
           <a:xfrm>
-            <a:off x="9771644" y="3036006"/>
+            <a:off x="9771644" y="3058595"/>
             <a:ext cx="1706819" cy="237744"/>
           </a:xfrm>
           <a:prstGeom prst="rect">
@@ -5943,8 +5993,8 @@
         </p:nvSpPr>
         <p:spPr>
           <a:xfrm>
-            <a:off x="548640" y="4297878"/>
-            <a:ext cx="11094415" cy="470662"/>
+            <a:off x="548640" y="3832787"/>
+            <a:ext cx="9430252" cy="1008507"/>
           </a:xfrm>
           <a:prstGeom prst="rect">
             <a:avLst/>
@@ -5987,8 +6037,8 @@
         </p:nvSpPr>
         <p:spPr>
           <a:xfrm>
-            <a:off x="548640" y="4297878"/>
-            <a:ext cx="73152" cy="470662"/>
+            <a:off x="548640" y="3832787"/>
+            <a:ext cx="91440" cy="1008507"/>
           </a:xfrm>
           <a:prstGeom prst="rect">
             <a:avLst/>
@@ -6031,8 +6081,8 @@
         </p:nvSpPr>
         <p:spPr>
           <a:xfrm>
-            <a:off x="749808" y="4425894"/>
-            <a:ext cx="10765231" cy="214630"/>
+            <a:off x="859536" y="4052243"/>
+            <a:ext cx="8899900" cy="569595"/>
           </a:xfrm>
           <a:prstGeom prst="rect">
             <a:avLst/>
@@ -6046,7 +6096,7 @@
           <a:lstStyle/>
           <a:p>
             <a:r>
-              <a:rPr sz="1300" b="0" i="0">
+              <a:rPr sz="1725" b="1" i="0">
                 <a:solidFill>
                   <a:srgbClr val="14161A"/>
                 </a:solidFill>
@@ -6085,13 +6135,48 @@
       <p:grpSpPr/>
       <p:sp>
         <p:nvSpPr>
-          <p:cNvPr id="2" name="Rectangle 1"/>
+          <p:cNvPr id="2" name="TextBox 1"/>
+          <p:cNvSpPr txBox="1"/>
+          <p:nvPr/>
+        </p:nvSpPr>
+        <p:spPr>
+          <a:xfrm>
+            <a:off x="7619695" y="274320"/>
+            <a:ext cx="4023360" cy="6309360"/>
+          </a:xfrm>
+          <a:prstGeom prst="rect">
+            <a:avLst/>
+          </a:prstGeom>
+          <a:noFill/>
+        </p:spPr>
+        <p:txBody>
+          <a:bodyPr wrap="square" lIns="0" rIns="0" tIns="0" bIns="0" anchor="ctr">
+            <a:normAutofit/>
+          </a:bodyPr>
+          <a:lstStyle/>
+          <a:p>
+            <a:pPr algn="r"/>
+            <a:r>
+              <a:rPr sz="15000" b="1" i="0">
+                <a:solidFill>
+                  <a:srgbClr val="3C5677"/>
+                </a:solidFill>
+                <a:latin typeface="IBM Plex Sans"/>
+              </a:rPr>
+              <a:t>02</a:t>
+            </a:r>
+          </a:p>
+        </p:txBody>
+      </p:sp>
+      <p:sp>
+        <p:nvSpPr>
+          <p:cNvPr id="3" name="Rectangle 2"/>
           <p:cNvSpPr/>
           <p:nvPr/>
         </p:nvSpPr>
         <p:spPr>
           <a:xfrm>
-            <a:off x="548640" y="2487168"/>
+            <a:off x="548640" y="2649474"/>
             <a:ext cx="1097280" cy="45720"/>
           </a:xfrm>
           <a:prstGeom prst="rect">
@@ -6129,14 +6214,14 @@
       </p:sp>
       <p:sp>
         <p:nvSpPr>
-          <p:cNvPr id="3" name="TextBox 2"/>
+          <p:cNvPr id="4" name="TextBox 3"/>
           <p:cNvSpPr txBox="1"/>
           <p:nvPr/>
         </p:nvSpPr>
         <p:spPr>
           <a:xfrm>
-            <a:off x="548640" y="2743200"/>
-            <a:ext cx="11094415" cy="1005840"/>
+            <a:off x="548640" y="2951226"/>
+            <a:ext cx="11094415" cy="822960"/>
           </a:xfrm>
           <a:prstGeom prst="rect">
             <a:avLst/>
@@ -6163,14 +6248,14 @@
       </p:sp>
       <p:sp>
         <p:nvSpPr>
-          <p:cNvPr id="4" name="TextBox 3"/>
+          <p:cNvPr id="5" name="TextBox 4"/>
           <p:cNvSpPr txBox="1"/>
           <p:nvPr/>
         </p:nvSpPr>
         <p:spPr>
           <a:xfrm>
-            <a:off x="548640" y="3886200"/>
-            <a:ext cx="11094415" cy="548640"/>
+            <a:off x="548640" y="3774186"/>
+            <a:ext cx="11094415" cy="434340"/>
           </a:xfrm>
           <a:prstGeom prst="rect">
             <a:avLst/>
@@ -6244,7 +6329,7 @@
           <a:lstStyle/>
           <a:p>
             <a:r>
-              <a:rPr sz="2600" b="1" i="0">
+              <a:rPr sz="3000" b="1" i="0">
                 <a:solidFill>
                   <a:srgbClr val="14161A"/>
                 </a:solidFill>
@@ -6264,7 +6349,7 @@
         <p:spPr>
           <a:xfrm>
             <a:off x="548640" y="1042416"/>
-            <a:ext cx="11094415" cy="25603"/>
+            <a:ext cx="1097280" cy="25603"/>
           </a:xfrm>
           <a:prstGeom prst="rect">
             <a:avLst/>
@@ -6307,7 +6392,7 @@
         </p:nvSpPr>
         <p:spPr>
           <a:xfrm>
-            <a:off x="548640" y="2514813"/>
+            <a:off x="548640" y="2740536"/>
             <a:ext cx="2036003" cy="1280160"/>
           </a:xfrm>
           <a:prstGeom prst="roundRect">
@@ -6351,8 +6436,8 @@
         </p:nvSpPr>
         <p:spPr>
           <a:xfrm>
-            <a:off x="713232" y="2679405"/>
-            <a:ext cx="1706819" cy="384048"/>
+            <a:off x="713232" y="2905128"/>
+            <a:ext cx="1706819" cy="487680"/>
           </a:xfrm>
           <a:prstGeom prst="rect">
             <a:avLst/>
@@ -6385,7 +6470,7 @@
         </p:nvSpPr>
         <p:spPr>
           <a:xfrm>
-            <a:off x="713232" y="3136605"/>
+            <a:off x="713232" y="3392808"/>
             <a:ext cx="1706819" cy="237744"/>
           </a:xfrm>
           <a:prstGeom prst="rect">
@@ -6419,7 +6504,7 @@
         </p:nvSpPr>
         <p:spPr>
           <a:xfrm>
-            <a:off x="2813243" y="2514813"/>
+            <a:off x="2813243" y="2740536"/>
             <a:ext cx="2036003" cy="1280160"/>
           </a:xfrm>
           <a:prstGeom prst="roundRect">
@@ -6463,8 +6548,8 @@
         </p:nvSpPr>
         <p:spPr>
           <a:xfrm>
-            <a:off x="2977835" y="2679405"/>
-            <a:ext cx="1706819" cy="384048"/>
+            <a:off x="2977835" y="2905128"/>
+            <a:ext cx="1706819" cy="487680"/>
           </a:xfrm>
           <a:prstGeom prst="rect">
             <a:avLst/>
@@ -6477,8 +6562,13 @@
           </a:bodyPr>
           <a:lstStyle/>
           <a:p>
-            <a:r>
-              <a:rPr sz="1850" b="1" i="0">
+            <a:pPr>
+              <a:lnSpc>
+                <a:spcPct val="80000"/>
+              </a:lnSpc>
+            </a:pPr>
+            <a:r>
+              <a:rPr sz="2000" b="1" i="0">
                 <a:solidFill>
                   <a:srgbClr val="1F3D63"/>
                 </a:solidFill>
@@ -6497,7 +6587,7 @@
         </p:nvSpPr>
         <p:spPr>
           <a:xfrm>
-            <a:off x="2977835" y="3136605"/>
+            <a:off x="2977835" y="3392808"/>
             <a:ext cx="1706819" cy="237744"/>
           </a:xfrm>
           <a:prstGeom prst="rect">
@@ -6531,7 +6621,7 @@
         </p:nvSpPr>
         <p:spPr>
           <a:xfrm>
-            <a:off x="5077846" y="2514813"/>
+            <a:off x="5077846" y="2740536"/>
             <a:ext cx="2036003" cy="1280160"/>
           </a:xfrm>
           <a:prstGeom prst="roundRect">
@@ -6575,8 +6665,8 @@
         </p:nvSpPr>
         <p:spPr>
           <a:xfrm>
-            <a:off x="5242438" y="2679405"/>
-            <a:ext cx="1706819" cy="384048"/>
+            <a:off x="5242438" y="2905128"/>
+            <a:ext cx="1706819" cy="487680"/>
           </a:xfrm>
           <a:prstGeom prst="rect">
             <a:avLst/>
@@ -6609,7 +6699,7 @@
         </p:nvSpPr>
         <p:spPr>
           <a:xfrm>
-            <a:off x="5242438" y="3136605"/>
+            <a:off x="5242438" y="3392808"/>
             <a:ext cx="1706819" cy="237744"/>
           </a:xfrm>
           <a:prstGeom prst="rect">
@@ -6643,7 +6733,7 @@
         </p:nvSpPr>
         <p:spPr>
           <a:xfrm>
-            <a:off x="7342449" y="2514813"/>
+            <a:off x="7342449" y="2740536"/>
             <a:ext cx="2036003" cy="1280160"/>
           </a:xfrm>
           <a:prstGeom prst="roundRect">
@@ -6687,8 +6777,47 @@
         </p:nvSpPr>
         <p:spPr>
           <a:xfrm>
-            <a:off x="7507041" y="2679405"/>
-            <a:ext cx="1706819" cy="384048"/>
+            <a:off x="7507041" y="2905128"/>
+            <a:ext cx="1706819" cy="487680"/>
+          </a:xfrm>
+          <a:prstGeom prst="rect">
+            <a:avLst/>
+          </a:prstGeom>
+          <a:noFill/>
+        </p:spPr>
+        <p:txBody>
+          <a:bodyPr wrap="square" lIns="0" rIns="0" tIns="0" bIns="0">
+            <a:normAutofit fontScale="100000" lnSpcReduction="0"/>
+          </a:bodyPr>
+          <a:lstStyle/>
+          <a:p>
+            <a:pPr>
+              <a:lnSpc>
+                <a:spcPct val="80000"/>
+              </a:lnSpc>
+            </a:pPr>
+            <a:r>
+              <a:rPr sz="2000" b="1" i="0">
+                <a:solidFill>
+                  <a:srgbClr val="1F3D63"/>
+                </a:solidFill>
+                <a:latin typeface="IBM Plex Sans"/>
+              </a:rPr>
+              <a:t>Diagram IR + draw.io</a:t>
+            </a:r>
+          </a:p>
+        </p:txBody>
+      </p:sp>
+      <p:sp>
+        <p:nvSpPr>
+          <p:cNvPr id="15" name="TextBox 14"/>
+          <p:cNvSpPr txBox="1"/>
+          <p:nvPr/>
+        </p:nvSpPr>
+        <p:spPr>
+          <a:xfrm>
+            <a:off x="7507041" y="3392808"/>
+            <a:ext cx="1706819" cy="237744"/>
           </a:xfrm>
           <a:prstGeom prst="rect">
             <a:avLst/>
@@ -6702,40 +6831,6 @@
           <a:lstStyle/>
           <a:p>
             <a:r>
-              <a:rPr sz="2400" b="1" i="0">
-                <a:solidFill>
-                  <a:srgbClr val="1F3D63"/>
-                </a:solidFill>
-                <a:latin typeface="IBM Plex Sans"/>
-              </a:rPr>
-              <a:t>D2 + SVG</a:t>
-            </a:r>
-          </a:p>
-        </p:txBody>
-      </p:sp>
-      <p:sp>
-        <p:nvSpPr>
-          <p:cNvPr id="15" name="TextBox 14"/>
-          <p:cNvSpPr txBox="1"/>
-          <p:nvPr/>
-        </p:nvSpPr>
-        <p:spPr>
-          <a:xfrm>
-            <a:off x="7507041" y="3136605"/>
-            <a:ext cx="1706819" cy="237744"/>
-          </a:xfrm>
-          <a:prstGeom prst="rect">
-            <a:avLst/>
-          </a:prstGeom>
-          <a:noFill/>
-        </p:spPr>
-        <p:txBody>
-          <a:bodyPr wrap="square" lIns="0" rIns="0" tIns="0" bIns="0">
-            <a:normAutofit/>
-          </a:bodyPr>
-          <a:lstStyle/>
-          <a:p>
-            <a:r>
               <a:rPr sz="1300" b="0" i="0">
                 <a:solidFill>
                   <a:srgbClr val="5E6B7A"/>
@@ -6755,7 +6850,7 @@
         </p:nvSpPr>
         <p:spPr>
           <a:xfrm>
-            <a:off x="9607052" y="2514813"/>
+            <a:off x="9607052" y="2740536"/>
             <a:ext cx="2036003" cy="1280160"/>
           </a:xfrm>
           <a:prstGeom prst="roundRect">
@@ -6799,8 +6894,8 @@
         </p:nvSpPr>
         <p:spPr>
           <a:xfrm>
-            <a:off x="9771644" y="2679405"/>
-            <a:ext cx="1706819" cy="384048"/>
+            <a:off x="9771644" y="2905128"/>
+            <a:ext cx="1706819" cy="487680"/>
           </a:xfrm>
           <a:prstGeom prst="rect">
             <a:avLst/>
@@ -6833,7 +6928,7 @@
         </p:nvSpPr>
         <p:spPr>
           <a:xfrm>
-            <a:off x="9771644" y="3136605"/>
+            <a:off x="9771644" y="3392808"/>
             <a:ext cx="1706819" cy="237744"/>
           </a:xfrm>
           <a:prstGeom prst="rect">
@@ -6867,8 +6962,8 @@
         </p:nvSpPr>
         <p:spPr>
           <a:xfrm>
-            <a:off x="548640" y="4398477"/>
-            <a:ext cx="11094415" cy="231140"/>
+            <a:off x="548640" y="4167000"/>
+            <a:ext cx="11094415" cy="265811"/>
           </a:xfrm>
           <a:prstGeom prst="rect">
             <a:avLst/>
@@ -6882,7 +6977,7 @@
           <a:lstStyle/>
           <a:p>
             <a:r>
-              <a:rPr sz="1400" b="0" i="0">
+              <a:rPr sz="1609" b="0" i="0">
                 <a:solidFill>
                   <a:srgbClr val="14161A"/>
                 </a:solidFill>
@@ -6942,7 +7037,7 @@
           <a:lstStyle/>
           <a:p>
             <a:r>
-              <a:rPr sz="2600" b="1" i="0">
+              <a:rPr sz="3000" b="1" i="0">
                 <a:solidFill>
                   <a:srgbClr val="14161A"/>
                 </a:solidFill>
@@ -6962,7 +7057,7 @@
         <p:spPr>
           <a:xfrm>
             <a:off x="548640" y="1042416"/>
-            <a:ext cx="11094415" cy="25603"/>
+            <a:ext cx="1097280" cy="25603"/>
           </a:xfrm>
           <a:prstGeom prst="rect">
             <a:avLst/>
@@ -7005,8 +7100,8 @@
         </p:nvSpPr>
         <p:spPr>
           <a:xfrm>
-            <a:off x="548640" y="2063663"/>
-            <a:ext cx="11094415" cy="231140"/>
+            <a:off x="548640" y="2349030"/>
+            <a:ext cx="11094415" cy="265811"/>
           </a:xfrm>
           <a:prstGeom prst="rect">
             <a:avLst/>
@@ -7020,7 +7115,7 @@
           <a:lstStyle/>
           <a:p>
             <a:r>
-              <a:rPr sz="1400" b="0" i="0">
+              <a:rPr sz="1609" b="0" i="0">
                 <a:solidFill>
                   <a:srgbClr val="14161A"/>
                 </a:solidFill>
@@ -7039,7 +7134,7 @@
         </p:nvSpPr>
         <p:spPr>
           <a:xfrm>
-            <a:off x="548640" y="2898307"/>
+            <a:off x="548640" y="2761145"/>
             <a:ext cx="2036003" cy="1280160"/>
           </a:xfrm>
           <a:prstGeom prst="roundRect">
@@ -7083,8 +7178,8 @@
         </p:nvSpPr>
         <p:spPr>
           <a:xfrm>
-            <a:off x="713232" y="3062899"/>
-            <a:ext cx="1706819" cy="384048"/>
+            <a:off x="713232" y="2925737"/>
+            <a:ext cx="1706819" cy="487680"/>
           </a:xfrm>
           <a:prstGeom prst="rect">
             <a:avLst/>
@@ -7103,7 +7198,7 @@
               </a:lnSpc>
             </a:pPr>
             <a:r>
-              <a:rPr sz="1600" b="1" i="0">
+              <a:rPr sz="2000" b="1" i="0">
                 <a:solidFill>
                   <a:srgbClr val="1F3D63"/>
                 </a:solidFill>
@@ -7122,7 +7217,7 @@
         </p:nvSpPr>
         <p:spPr>
           <a:xfrm>
-            <a:off x="713232" y="3520099"/>
+            <a:off x="713232" y="3413417"/>
             <a:ext cx="1706819" cy="237744"/>
           </a:xfrm>
           <a:prstGeom prst="rect">
@@ -7156,7 +7251,7 @@
         </p:nvSpPr>
         <p:spPr>
           <a:xfrm>
-            <a:off x="2813243" y="2898307"/>
+            <a:off x="2813243" y="2761145"/>
             <a:ext cx="2036003" cy="1280160"/>
           </a:xfrm>
           <a:prstGeom prst="roundRect">
@@ -7200,8 +7295,8 @@
         </p:nvSpPr>
         <p:spPr>
           <a:xfrm>
-            <a:off x="2977835" y="3062899"/>
-            <a:ext cx="1706819" cy="384048"/>
+            <a:off x="2977835" y="2925737"/>
+            <a:ext cx="1706819" cy="487680"/>
           </a:xfrm>
           <a:prstGeom prst="rect">
             <a:avLst/>
@@ -7234,7 +7329,7 @@
         </p:nvSpPr>
         <p:spPr>
           <a:xfrm>
-            <a:off x="2977835" y="3520099"/>
+            <a:off x="2977835" y="3413417"/>
             <a:ext cx="1706819" cy="237744"/>
           </a:xfrm>
           <a:prstGeom prst="rect">
@@ -7268,7 +7363,7 @@
         </p:nvSpPr>
         <p:spPr>
           <a:xfrm>
-            <a:off x="5077846" y="2898307"/>
+            <a:off x="5077846" y="2761145"/>
             <a:ext cx="2036003" cy="1280160"/>
           </a:xfrm>
           <a:prstGeom prst="roundRect">
@@ -7312,8 +7407,8 @@
         </p:nvSpPr>
         <p:spPr>
           <a:xfrm>
-            <a:off x="5242438" y="3062899"/>
-            <a:ext cx="1706819" cy="384048"/>
+            <a:off x="5242438" y="2925737"/>
+            <a:ext cx="1706819" cy="487680"/>
           </a:xfrm>
           <a:prstGeom prst="rect">
             <a:avLst/>
@@ -7332,7 +7427,7 @@
               </a:lnSpc>
             </a:pPr>
             <a:r>
-              <a:rPr sz="1600" b="1" i="0">
+              <a:rPr sz="1950" b="1" i="0">
                 <a:solidFill>
                   <a:srgbClr val="1F3D63"/>
                 </a:solidFill>
@@ -7351,7 +7446,7 @@
         </p:nvSpPr>
         <p:spPr>
           <a:xfrm>
-            <a:off x="5242438" y="3520099"/>
+            <a:off x="5242438" y="3413417"/>
             <a:ext cx="1706819" cy="237744"/>
           </a:xfrm>
           <a:prstGeom prst="rect">
@@ -7385,7 +7480,7 @@
         </p:nvSpPr>
         <p:spPr>
           <a:xfrm>
-            <a:off x="7342449" y="2898307"/>
+            <a:off x="7342449" y="2761145"/>
             <a:ext cx="2036003" cy="1280160"/>
           </a:xfrm>
           <a:prstGeom prst="roundRect">
@@ -7429,8 +7524,8 @@
         </p:nvSpPr>
         <p:spPr>
           <a:xfrm>
-            <a:off x="7507041" y="3062899"/>
-            <a:ext cx="1706819" cy="384048"/>
+            <a:off x="7507041" y="2925737"/>
+            <a:ext cx="1706819" cy="487680"/>
           </a:xfrm>
           <a:prstGeom prst="rect">
             <a:avLst/>
@@ -7463,7 +7558,7 @@
         </p:nvSpPr>
         <p:spPr>
           <a:xfrm>
-            <a:off x="7507041" y="3520099"/>
+            <a:off x="7507041" y="3413417"/>
             <a:ext cx="1706819" cy="237744"/>
           </a:xfrm>
           <a:prstGeom prst="rect">
@@ -7497,7 +7592,7 @@
         </p:nvSpPr>
         <p:spPr>
           <a:xfrm>
-            <a:off x="9607052" y="2898307"/>
+            <a:off x="9607052" y="2761145"/>
             <a:ext cx="2036003" cy="1280160"/>
           </a:xfrm>
           <a:prstGeom prst="roundRect">
@@ -7541,8 +7636,8 @@
         </p:nvSpPr>
         <p:spPr>
           <a:xfrm>
-            <a:off x="9771644" y="3062899"/>
-            <a:ext cx="1706819" cy="384048"/>
+            <a:off x="9771644" y="2925737"/>
+            <a:ext cx="1706819" cy="487680"/>
           </a:xfrm>
           <a:prstGeom prst="rect">
             <a:avLst/>
@@ -7575,7 +7670,7 @@
         </p:nvSpPr>
         <p:spPr>
           <a:xfrm>
-            <a:off x="9771644" y="3520099"/>
+            <a:off x="9771644" y="3413417"/>
             <a:ext cx="1706819" cy="237744"/>
           </a:xfrm>
           <a:prstGeom prst="rect">
@@ -7609,8 +7704,8 @@
         </p:nvSpPr>
         <p:spPr>
           <a:xfrm>
-            <a:off x="548640" y="4781971"/>
-            <a:ext cx="11094415" cy="470662"/>
+            <a:off x="548640" y="4187609"/>
+            <a:ext cx="9430252" cy="723709"/>
           </a:xfrm>
           <a:prstGeom prst="rect">
             <a:avLst/>
@@ -7653,8 +7748,8 @@
         </p:nvSpPr>
         <p:spPr>
           <a:xfrm>
-            <a:off x="548640" y="4781971"/>
-            <a:ext cx="73152" cy="470662"/>
+            <a:off x="548640" y="4187609"/>
+            <a:ext cx="91440" cy="723709"/>
           </a:xfrm>
           <a:prstGeom prst="rect">
             <a:avLst/>
@@ -7697,8 +7792,8 @@
         </p:nvSpPr>
         <p:spPr>
           <a:xfrm>
-            <a:off x="749808" y="4909987"/>
-            <a:ext cx="10765231" cy="214630"/>
+            <a:off x="859536" y="4407065"/>
+            <a:ext cx="8899900" cy="284797"/>
           </a:xfrm>
           <a:prstGeom prst="rect">
             <a:avLst/>
@@ -7712,7 +7807,7 @@
           <a:lstStyle/>
           <a:p>
             <a:r>
-              <a:rPr sz="1300" b="0" i="0">
+              <a:rPr sz="1725" b="1" i="0">
                 <a:solidFill>
                   <a:srgbClr val="14161A"/>
                 </a:solidFill>
@@ -7772,7 +7867,7 @@
           <a:lstStyle/>
           <a:p>
             <a:r>
-              <a:rPr sz="2600" b="1" i="0">
+              <a:rPr sz="3000" b="1" i="0">
                 <a:solidFill>
                   <a:srgbClr val="14161A"/>
                 </a:solidFill>
@@ -7792,7 +7887,7 @@
         <p:spPr>
           <a:xfrm>
             <a:off x="548640" y="1042416"/>
-            <a:ext cx="11094415" cy="25603"/>
+            <a:ext cx="1097280" cy="25603"/>
           </a:xfrm>
           <a:prstGeom prst="rect">
             <a:avLst/>
@@ -7835,7 +7930,7 @@
         </p:nvSpPr>
         <p:spPr>
           <a:xfrm>
-            <a:off x="548640" y="2865363"/>
+            <a:off x="548640" y="3117189"/>
             <a:ext cx="2036003" cy="1280160"/>
           </a:xfrm>
           <a:prstGeom prst="roundRect">
@@ -7879,8 +7974,8 @@
         </p:nvSpPr>
         <p:spPr>
           <a:xfrm>
-            <a:off x="713232" y="3029955"/>
-            <a:ext cx="1706819" cy="384048"/>
+            <a:off x="713232" y="3281781"/>
+            <a:ext cx="1706819" cy="487680"/>
           </a:xfrm>
           <a:prstGeom prst="rect">
             <a:avLst/>
@@ -7913,7 +8008,7 @@
         </p:nvSpPr>
         <p:spPr>
           <a:xfrm>
-            <a:off x="713232" y="3487155"/>
+            <a:off x="713232" y="3769461"/>
             <a:ext cx="1706819" cy="237744"/>
           </a:xfrm>
           <a:prstGeom prst="rect">
@@ -7947,7 +8042,7 @@
         </p:nvSpPr>
         <p:spPr>
           <a:xfrm>
-            <a:off x="2813243" y="2865363"/>
+            <a:off x="2813243" y="3117189"/>
             <a:ext cx="2036003" cy="1280160"/>
           </a:xfrm>
           <a:prstGeom prst="roundRect">
@@ -7991,8 +8086,8 @@
         </p:nvSpPr>
         <p:spPr>
           <a:xfrm>
-            <a:off x="2977835" y="3029955"/>
-            <a:ext cx="1706819" cy="384048"/>
+            <a:off x="2977835" y="3281781"/>
+            <a:ext cx="1706819" cy="487680"/>
           </a:xfrm>
           <a:prstGeom prst="rect">
             <a:avLst/>
@@ -8025,7 +8120,7 @@
         </p:nvSpPr>
         <p:spPr>
           <a:xfrm>
-            <a:off x="2977835" y="3487155"/>
+            <a:off x="2977835" y="3769461"/>
             <a:ext cx="1706819" cy="237744"/>
           </a:xfrm>
           <a:prstGeom prst="rect">
@@ -8059,7 +8154,7 @@
         </p:nvSpPr>
         <p:spPr>
           <a:xfrm>
-            <a:off x="5077846" y="2865363"/>
+            <a:off x="5077846" y="3117189"/>
             <a:ext cx="2036003" cy="1280160"/>
           </a:xfrm>
           <a:prstGeom prst="roundRect">
@@ -8103,8 +8198,8 @@
         </p:nvSpPr>
         <p:spPr>
           <a:xfrm>
-            <a:off x="5242438" y="3029955"/>
-            <a:ext cx="1706819" cy="384048"/>
+            <a:off x="5242438" y="3281781"/>
+            <a:ext cx="1706819" cy="487680"/>
           </a:xfrm>
           <a:prstGeom prst="rect">
             <a:avLst/>
@@ -8137,7 +8232,7 @@
         </p:nvSpPr>
         <p:spPr>
           <a:xfrm>
-            <a:off x="5242438" y="3487155"/>
+            <a:off x="5242438" y="3769461"/>
             <a:ext cx="1706819" cy="237744"/>
           </a:xfrm>
           <a:prstGeom prst="rect">
@@ -8171,7 +8266,7 @@
         </p:nvSpPr>
         <p:spPr>
           <a:xfrm>
-            <a:off x="7342449" y="2865363"/>
+            <a:off x="7342449" y="3117189"/>
             <a:ext cx="2036003" cy="1280160"/>
           </a:xfrm>
           <a:prstGeom prst="roundRect">
@@ -8215,8 +8310,8 @@
         </p:nvSpPr>
         <p:spPr>
           <a:xfrm>
-            <a:off x="7507041" y="3029955"/>
-            <a:ext cx="1706819" cy="384048"/>
+            <a:off x="7507041" y="3281781"/>
+            <a:ext cx="1706819" cy="487680"/>
           </a:xfrm>
           <a:prstGeom prst="rect">
             <a:avLst/>
@@ -8249,7 +8344,7 @@
         </p:nvSpPr>
         <p:spPr>
           <a:xfrm>
-            <a:off x="7507041" y="3487155"/>
+            <a:off x="7507041" y="3769461"/>
             <a:ext cx="1706819" cy="237744"/>
           </a:xfrm>
           <a:prstGeom prst="rect">
@@ -8283,7 +8378,7 @@
         </p:nvSpPr>
         <p:spPr>
           <a:xfrm>
-            <a:off x="9607052" y="2865363"/>
+            <a:off x="9607052" y="3117189"/>
             <a:ext cx="2036003" cy="1280160"/>
           </a:xfrm>
           <a:prstGeom prst="roundRect">
@@ -8327,8 +8422,8 @@
         </p:nvSpPr>
         <p:spPr>
           <a:xfrm>
-            <a:off x="9771644" y="3029955"/>
-            <a:ext cx="1706819" cy="384048"/>
+            <a:off x="9771644" y="3281781"/>
+            <a:ext cx="1706819" cy="487680"/>
           </a:xfrm>
           <a:prstGeom prst="rect">
             <a:avLst/>
@@ -8361,7 +8456,7 @@
         </p:nvSpPr>
         <p:spPr>
           <a:xfrm>
-            <a:off x="9771644" y="3487155"/>
+            <a:off x="9771644" y="3769461"/>
             <a:ext cx="1706819" cy="237744"/>
           </a:xfrm>
           <a:prstGeom prst="rect">
